--- a/egyeb/E-Sport csapat adminisztrációs felület.pptx
+++ b/egyeb/E-Sport csapat adminisztrációs felület.pptx
@@ -117,6 +117,11 @@
       </a:defRPr>
     </a:lvl9pPr>
   </p:defaultTextStyle>
+  <p:extLst>
+    <p:ext uri="{EFAFB233-063F-42B5-8137-9DF3F51BA10A}">
+      <p15:sldGuideLst xmlns:p15="http://schemas.microsoft.com/office/powerpoint/2012/main"/>
+    </p:ext>
+  </p:extLst>
 </p:presentation>
 </file>
 
@@ -295,7 +300,9 @@
               </c:spPr>
             </c:leaderLines>
             <c:extLst>
-              <c:ext xmlns:c15="http://schemas.microsoft.com/office/drawing/2012/chart" uri="{CE6537A1-D6FC-4f65-9D91-7224C49458BB}"/>
+              <c:ext xmlns:c15="http://schemas.microsoft.com/office/drawing/2012/chart" uri="{CE6537A1-D6FC-4f65-9D91-7224C49458BB}">
+                <c15:layout/>
+              </c:ext>
             </c:extLst>
           </c:dLbls>
           <c:cat>
@@ -600,7 +607,9 @@
               </c:spPr>
             </c:leaderLines>
             <c:extLst>
-              <c:ext xmlns:c15="http://schemas.microsoft.com/office/drawing/2012/chart" uri="{CE6537A1-D6FC-4f65-9D91-7224C49458BB}"/>
+              <c:ext xmlns:c15="http://schemas.microsoft.com/office/drawing/2012/chart" uri="{CE6537A1-D6FC-4f65-9D91-7224C49458BB}">
+                <c15:layout/>
+              </c:ext>
             </c:extLst>
           </c:dLbls>
           <c:cat>
@@ -5029,7 +5038,7 @@
           <a:lstStyle/>
           <a:p>
             <a:r>
-              <a:rPr lang="hu-HU"/>
+              <a:rPr lang="hu-HU" dirty="0"/>
               <a:t>Mintacím szerkesztése</a:t>
             </a:r>
           </a:p>
@@ -5137,7 +5146,7 @@
                     <a:tint val="82000"/>
                   </a:schemeClr>
                 </a:solidFill>
-                <a:latin typeface="Abadi" panose="020F0502020204030204" pitchFamily="34" charset="-18"/>
+                <a:latin typeface="Corbel" panose="020B0503020204020204" pitchFamily="34" charset="0"/>
               </a:defRPr>
             </a:lvl1pPr>
           </a:lstStyle>
@@ -5186,7 +5195,7 @@
                     <a:tint val="82000"/>
                   </a:schemeClr>
                 </a:solidFill>
-                <a:latin typeface="Abadi" panose="020F0502020204030204" pitchFamily="34" charset="-18"/>
+                <a:latin typeface="Corbel" panose="020B0503020204020204" pitchFamily="34" charset="0"/>
               </a:defRPr>
             </a:lvl1pPr>
           </a:lstStyle>
@@ -5230,12 +5239,14 @@
                     <a:tint val="82000"/>
                   </a:schemeClr>
                 </a:solidFill>
+                <a:latin typeface="Corbel" panose="020B0503020204020204" pitchFamily="34" charset="0"/>
               </a:defRPr>
             </a:lvl1pPr>
           </a:lstStyle>
           <a:p>
             <a:fld id="{316FB627-8A5B-4705-B832-9EC695B06C12}" type="slidenum">
               <a:rPr lang="hu-HU" smtClean="0"/>
+              <a:pPr/>
               <a:t>‹#›</a:t>
             </a:fld>
             <a:endParaRPr lang="hu-HU"/>
@@ -5279,7 +5290,7 @@
               <a:lumMod val="95000"/>
             </a:schemeClr>
           </a:solidFill>
-          <a:latin typeface="Abadi" panose="020F0502020204030204" pitchFamily="34" charset="-18"/>
+          <a:latin typeface="Corbel" panose="020B0503020204020204" pitchFamily="34" charset="0"/>
           <a:ea typeface="+mj-ea"/>
           <a:cs typeface="+mj-cs"/>
         </a:defRPr>
@@ -5301,7 +5312,7 @@
               <a:lumMod val="95000"/>
             </a:schemeClr>
           </a:solidFill>
-          <a:latin typeface="Abadi" panose="020F0502020204030204" pitchFamily="34" charset="-18"/>
+          <a:latin typeface="Corbel" panose="020B0503020204020204" pitchFamily="34" charset="0"/>
           <a:ea typeface="+mn-ea"/>
           <a:cs typeface="+mn-cs"/>
         </a:defRPr>
@@ -5321,7 +5332,7 @@
               <a:lumMod val="95000"/>
             </a:schemeClr>
           </a:solidFill>
-          <a:latin typeface="Abadi" panose="020F0502020204030204" pitchFamily="34" charset="-18"/>
+          <a:latin typeface="Corbel" panose="020B0503020204020204" pitchFamily="34" charset="0"/>
           <a:ea typeface="+mn-ea"/>
           <a:cs typeface="+mn-cs"/>
         </a:defRPr>
@@ -5341,7 +5352,7 @@
               <a:lumMod val="95000"/>
             </a:schemeClr>
           </a:solidFill>
-          <a:latin typeface="Abadi" panose="020F0502020204030204" pitchFamily="34" charset="-18"/>
+          <a:latin typeface="Corbel" panose="020B0503020204020204" pitchFamily="34" charset="0"/>
           <a:ea typeface="+mn-ea"/>
           <a:cs typeface="+mn-cs"/>
         </a:defRPr>
@@ -5361,7 +5372,7 @@
               <a:lumMod val="95000"/>
             </a:schemeClr>
           </a:solidFill>
-          <a:latin typeface="Abadi" panose="020F0502020204030204" pitchFamily="34" charset="-18"/>
+          <a:latin typeface="Corbel" panose="020B0503020204020204" pitchFamily="34" charset="0"/>
           <a:ea typeface="+mn-ea"/>
           <a:cs typeface="+mn-cs"/>
         </a:defRPr>
@@ -5381,7 +5392,7 @@
               <a:lumMod val="95000"/>
             </a:schemeClr>
           </a:solidFill>
-          <a:latin typeface="Abadi" panose="020F0502020204030204" pitchFamily="34" charset="-18"/>
+          <a:latin typeface="Corbel" panose="020B0503020204020204" pitchFamily="34" charset="0"/>
           <a:ea typeface="+mn-ea"/>
           <a:cs typeface="+mn-cs"/>
         </a:defRPr>
@@ -5695,6 +5706,13 @@
   <p:clrMapOvr>
     <a:masterClrMapping/>
   </p:clrMapOvr>
+  <p:timing>
+    <p:tnLst>
+      <p:par>
+        <p:cTn id="1" dur="indefinite" restart="never" nodeType="tmRoot"/>
+      </p:par>
+    </p:tnLst>
+  </p:timing>
 </p:sld>
 </file>
 
@@ -6262,46 +6280,46 @@
               <a:lstStyle/>
               <a:p>
                 <a:r>
-                  <a:rPr lang="hu-HU" sz="2800" dirty="0"/>
+                  <a:rPr lang="hu-HU" sz="2400" dirty="0"/>
                   <a:t>Funkciók – Teljesítve</a:t>
                 </a:r>
               </a:p>
               <a:p>
                 <a:r>
-                  <a:rPr lang="hu-HU" sz="2800" dirty="0"/>
+                  <a:rPr lang="hu-HU" sz="2400" dirty="0"/>
                   <a:t>GitHub, </a:t>
                 </a:r>
                 <a:r>
-                  <a:rPr lang="hu-HU" sz="2800" dirty="0" err="1"/>
+                  <a:rPr lang="hu-HU" sz="2400" dirty="0" err="1"/>
                   <a:t>Trello</a:t>
                 </a:r>
                 <a:r>
-                  <a:rPr lang="hu-HU" sz="2800" dirty="0"/>
+                  <a:rPr lang="hu-HU" sz="2400" dirty="0"/>
                   <a:t>, </a:t>
                 </a:r>
                 <a:r>
-                  <a:rPr lang="hu-HU" sz="2800" dirty="0" err="1"/>
+                  <a:rPr lang="hu-HU" sz="2400" dirty="0" err="1"/>
                   <a:t>Figma</a:t>
                 </a:r>
                 <a:r>
-                  <a:rPr lang="hu-HU" sz="2800" dirty="0"/>
+                  <a:rPr lang="hu-HU" sz="2400" dirty="0"/>
                   <a:t> helyes használata - Teljesítve</a:t>
                 </a:r>
               </a:p>
               <a:p>
                 <a:r>
-                  <a:rPr lang="hu-HU" sz="2800" dirty="0"/>
+                  <a:rPr lang="hu-HU" sz="2400" dirty="0"/>
                   <a:t>Felhasznált eszközök – Claude, </a:t>
                 </a:r>
                 <a:r>
-                  <a:rPr lang="hu-HU" sz="2800" dirty="0" err="1"/>
+                  <a:rPr lang="hu-HU" sz="2400" dirty="0" err="1"/>
                   <a:t>DeepSeek</a:t>
                 </a:r>
-                <a:endParaRPr lang="hu-HU" sz="2800" dirty="0"/>
+                <a:endParaRPr lang="hu-HU" sz="2400" dirty="0"/>
               </a:p>
               <a:p>
                 <a:r>
-                  <a:rPr lang="hu-HU" sz="2800" dirty="0"/>
+                  <a:rPr lang="hu-HU" sz="2400" dirty="0"/>
                   <a:t>Kidolgozott grafika - Teljesítve</a:t>
                 </a:r>
               </a:p>
@@ -6404,18 +6422,25 @@
   <p:clrMapOvr>
     <a:masterClrMapping/>
   </p:clrMapOvr>
-  <mc:AlternateContent xmlns:mc="http://schemas.openxmlformats.org/markup-compatibility/2006">
-    <mc:Choice xmlns:p159="http://schemas.microsoft.com/office/powerpoint/2015/09/main" Requires="p159">
+  <mc:AlternateContent xmlns:mc="http://schemas.openxmlformats.org/markup-compatibility/2006" xmlns:p159="http://schemas.microsoft.com/office/powerpoint/2015/09/main">
+    <mc:Choice Requires="p159">
       <p:transition spd="slow">
         <p159:morph option="byObject"/>
       </p:transition>
     </mc:Choice>
-    <mc:Fallback>
+    <mc:Fallback xmlns="">
       <p:transition spd="slow">
         <p:fade/>
       </p:transition>
     </mc:Fallback>
   </mc:AlternateContent>
+  <p:timing>
+    <p:tnLst>
+      <p:par>
+        <p:cTn id="1" dur="indefinite" restart="never" nodeType="tmRoot"/>
+      </p:par>
+    </p:tnLst>
+  </p:timing>
 </p:sld>
 </file>
 
@@ -6562,18 +6587,25 @@
   <p:clrMapOvr>
     <a:masterClrMapping/>
   </p:clrMapOvr>
-  <mc:AlternateContent xmlns:mc="http://schemas.openxmlformats.org/markup-compatibility/2006">
-    <mc:Choice xmlns:p159="http://schemas.microsoft.com/office/powerpoint/2015/09/main" Requires="p159">
+  <mc:AlternateContent xmlns:mc="http://schemas.openxmlformats.org/markup-compatibility/2006" xmlns:p159="http://schemas.microsoft.com/office/powerpoint/2015/09/main">
+    <mc:Choice Requires="p159">
       <p:transition xmlns:p14="http://schemas.microsoft.com/office/powerpoint/2010/main" spd="slow" p14:dur="2000">
         <p159:morph option="byObject"/>
       </p:transition>
     </mc:Choice>
-    <mc:Fallback>
+    <mc:Fallback xmlns="">
       <p:transition spd="slow">
         <p:fade/>
       </p:transition>
     </mc:Fallback>
   </mc:AlternateContent>
+  <p:timing>
+    <p:tnLst>
+      <p:par>
+        <p:cTn id="1" dur="indefinite" restart="never" nodeType="tmRoot"/>
+      </p:par>
+    </p:tnLst>
+  </p:timing>
 </p:sld>
 </file>
 
@@ -6828,14 +6860,14 @@
                 <a:buChar char="•"/>
               </a:pPr>
               <a:r>
-                <a:rPr lang="hu-HU" sz="2400" dirty="0"/>
+                <a:rPr lang="hu-HU" sz="2200" dirty="0"/>
                 <a:t>GitHub </a:t>
               </a:r>
               <a:r>
-                <a:rPr lang="hu-HU" sz="2400" dirty="0" err="1"/>
+                <a:rPr lang="hu-HU" sz="2200" dirty="0" err="1"/>
                 <a:t>init</a:t>
               </a:r>
-              <a:endParaRPr lang="hu-HU" sz="2400" dirty="0"/>
+              <a:endParaRPr lang="hu-HU" sz="2200" dirty="0"/>
             </a:p>
             <a:p>
               <a:pPr marL="457200" indent="-457200">
@@ -6843,7 +6875,7 @@
                 <a:buChar char="•"/>
               </a:pPr>
               <a:r>
-                <a:rPr lang="hu-HU" sz="2400" dirty="0"/>
+                <a:rPr lang="hu-HU" sz="2200" dirty="0"/>
                 <a:t>Game.js osztály</a:t>
               </a:r>
             </a:p>
@@ -6853,7 +6885,7 @@
                 <a:buChar char="•"/>
               </a:pPr>
               <a:r>
-                <a:rPr lang="hu-HU" sz="2400" dirty="0"/>
+                <a:rPr lang="hu-HU" sz="2200" dirty="0"/>
                 <a:t>Adatmodellezés tervezése</a:t>
               </a:r>
             </a:p>
@@ -6863,7 +6895,7 @@
                 <a:buChar char="•"/>
               </a:pPr>
               <a:r>
-                <a:rPr lang="hu-HU" sz="2400" dirty="0"/>
+                <a:rPr lang="hu-HU" sz="2200" dirty="0"/>
                 <a:t>Játékosok megjelenítése, szerkesztése</a:t>
               </a:r>
             </a:p>
@@ -6873,7 +6905,7 @@
                 <a:buChar char="•"/>
               </a:pPr>
               <a:r>
-                <a:rPr lang="hu-HU" sz="2400" dirty="0"/>
+                <a:rPr lang="hu-HU" sz="2200" dirty="0"/>
                 <a:t>Játékosokhoz tartozó statisztikák megjelenítése, szerkesztése</a:t>
               </a:r>
             </a:p>
@@ -7010,7 +7042,7 @@
                 <a:buChar char="•"/>
               </a:pPr>
               <a:r>
-                <a:rPr lang="hu-HU" sz="2400" dirty="0"/>
+                <a:rPr lang="hu-HU" sz="2200" dirty="0"/>
                 <a:t>Tesztkörnyezet előkészítése</a:t>
               </a:r>
             </a:p>
@@ -7020,11 +7052,11 @@
                 <a:buChar char="•"/>
               </a:pPr>
               <a:r>
-                <a:rPr lang="hu-HU" sz="2400" dirty="0" err="1"/>
+                <a:rPr lang="hu-HU" sz="2200" dirty="0" err="1"/>
                 <a:t>Figma</a:t>
               </a:r>
               <a:r>
-                <a:rPr lang="hu-HU" sz="2400" dirty="0"/>
+                <a:rPr lang="hu-HU" sz="2200" dirty="0"/>
                 <a:t> terv teljes</a:t>
               </a:r>
             </a:p>
@@ -7034,7 +7066,7 @@
                 <a:buChar char="•"/>
               </a:pPr>
               <a:r>
-                <a:rPr lang="hu-HU" sz="2400" dirty="0"/>
+                <a:rPr lang="hu-HU" sz="2200" dirty="0"/>
                 <a:t>Player.js osztály</a:t>
               </a:r>
             </a:p>
@@ -7044,7 +7076,7 @@
                 <a:buChar char="•"/>
               </a:pPr>
               <a:r>
-                <a:rPr lang="hu-HU" sz="2400" dirty="0"/>
+                <a:rPr lang="hu-HU" sz="2200" dirty="0"/>
                 <a:t>Játékosok hozzáadása, törlése</a:t>
               </a:r>
             </a:p>
@@ -7054,7 +7086,7 @@
                 <a:buChar char="•"/>
               </a:pPr>
               <a:r>
-                <a:rPr lang="hu-HU" sz="2400" dirty="0"/>
+                <a:rPr lang="hu-HU" sz="2200" dirty="0"/>
                 <a:t>Web design, CSS</a:t>
               </a:r>
             </a:p>
@@ -7064,19 +7096,19 @@
                 <a:buChar char="•"/>
               </a:pPr>
               <a:r>
-                <a:rPr lang="hu-HU" sz="2400" dirty="0" err="1"/>
+                <a:rPr lang="hu-HU" sz="2200" dirty="0" err="1"/>
                 <a:t>Toastok</a:t>
               </a:r>
               <a:r>
-                <a:rPr lang="hu-HU" sz="2400" dirty="0"/>
+                <a:rPr lang="hu-HU" sz="2200" dirty="0"/>
                 <a:t>, </a:t>
               </a:r>
               <a:r>
-                <a:rPr lang="hu-HU" sz="2400" dirty="0" err="1"/>
+                <a:rPr lang="hu-HU" sz="2200" dirty="0" err="1"/>
                 <a:t>Modalok</a:t>
               </a:r>
               <a:r>
-                <a:rPr lang="hu-HU" sz="2400" dirty="0"/>
+                <a:rPr lang="hu-HU" sz="2200" dirty="0"/>
                 <a:t> kivitelezése</a:t>
               </a:r>
             </a:p>
@@ -7086,7 +7118,7 @@
                 <a:buChar char="•"/>
               </a:pPr>
               <a:r>
-                <a:rPr lang="hu-HU" sz="2400" dirty="0"/>
+                <a:rPr lang="hu-HU" sz="2200" dirty="0"/>
                 <a:t>PPT</a:t>
               </a:r>
             </a:p>
@@ -7155,18 +7187,25 @@
   <p:clrMapOvr>
     <a:masterClrMapping/>
   </p:clrMapOvr>
-  <mc:AlternateContent xmlns:mc="http://schemas.openxmlformats.org/markup-compatibility/2006">
-    <mc:Choice xmlns:p159="http://schemas.microsoft.com/office/powerpoint/2015/09/main" Requires="p159">
+  <mc:AlternateContent xmlns:mc="http://schemas.openxmlformats.org/markup-compatibility/2006" xmlns:p159="http://schemas.microsoft.com/office/powerpoint/2015/09/main">
+    <mc:Choice Requires="p159">
       <p:transition xmlns:p14="http://schemas.microsoft.com/office/powerpoint/2010/main" spd="slow" p14:dur="2000">
         <p159:morph option="byObject"/>
       </p:transition>
     </mc:Choice>
-    <mc:Fallback>
+    <mc:Fallback xmlns="">
       <p:transition spd="slow">
         <p:fade/>
       </p:transition>
     </mc:Fallback>
   </mc:AlternateContent>
+  <p:timing>
+    <p:tnLst>
+      <p:par>
+        <p:cTn id="1" dur="indefinite" restart="never" nodeType="tmRoot"/>
+      </p:par>
+    </p:tnLst>
+  </p:timing>
 </p:sld>
 </file>
 
@@ -7348,14 +7387,14 @@
                 <a:buChar char="•"/>
               </a:pPr>
               <a:r>
-                <a:rPr lang="hu-HU" sz="2400" dirty="0"/>
+                <a:rPr lang="hu-HU" sz="2200" dirty="0"/>
                 <a:t>GitHub </a:t>
               </a:r>
               <a:r>
-                <a:rPr lang="hu-HU" sz="2400" dirty="0" err="1"/>
+                <a:rPr lang="hu-HU" sz="2200" dirty="0" err="1"/>
                 <a:t>init</a:t>
               </a:r>
-              <a:endParaRPr lang="hu-HU" sz="2400" dirty="0"/>
+              <a:endParaRPr lang="hu-HU" sz="2200" dirty="0"/>
             </a:p>
             <a:p>
               <a:pPr marL="457200" indent="-457200">
@@ -7363,7 +7402,7 @@
                 <a:buChar char="•"/>
               </a:pPr>
               <a:r>
-                <a:rPr lang="hu-HU" sz="2400" dirty="0"/>
+                <a:rPr lang="hu-HU" sz="2200" dirty="0"/>
                 <a:t>Game.js osztály</a:t>
               </a:r>
             </a:p>
@@ -7373,7 +7412,7 @@
                 <a:buChar char="•"/>
               </a:pPr>
               <a:r>
-                <a:rPr lang="hu-HU" sz="2400" dirty="0"/>
+                <a:rPr lang="hu-HU" sz="2200" dirty="0"/>
                 <a:t>Adatmodellezés tervezése</a:t>
               </a:r>
             </a:p>
@@ -7383,7 +7422,7 @@
                 <a:buChar char="•"/>
               </a:pPr>
               <a:r>
-                <a:rPr lang="hu-HU" sz="2400" dirty="0"/>
+                <a:rPr lang="hu-HU" sz="2200" dirty="0"/>
                 <a:t>Játékosok megjelenítése, szerkesztése</a:t>
               </a:r>
             </a:p>
@@ -7393,7 +7432,7 @@
                 <a:buChar char="•"/>
               </a:pPr>
               <a:r>
-                <a:rPr lang="hu-HU" sz="2400" dirty="0"/>
+                <a:rPr lang="hu-HU" sz="2200" dirty="0"/>
                 <a:t>Játékosokhoz tartozó statisztikák megjelenítése, szerkesztése</a:t>
               </a:r>
             </a:p>
@@ -7530,7 +7569,7 @@
                 <a:buChar char="•"/>
               </a:pPr>
               <a:r>
-                <a:rPr lang="hu-HU" sz="2400" dirty="0"/>
+                <a:rPr lang="hu-HU" sz="2200" dirty="0"/>
                 <a:t>Tesztkörnyezet előkészítése</a:t>
               </a:r>
             </a:p>
@@ -7540,11 +7579,11 @@
                 <a:buChar char="•"/>
               </a:pPr>
               <a:r>
-                <a:rPr lang="hu-HU" sz="2400" dirty="0" err="1"/>
+                <a:rPr lang="hu-HU" sz="2200" dirty="0" err="1"/>
                 <a:t>Figma</a:t>
               </a:r>
               <a:r>
-                <a:rPr lang="hu-HU" sz="2400" dirty="0"/>
+                <a:rPr lang="hu-HU" sz="2200" dirty="0"/>
                 <a:t> terv teljes</a:t>
               </a:r>
             </a:p>
@@ -7554,7 +7593,7 @@
                 <a:buChar char="•"/>
               </a:pPr>
               <a:r>
-                <a:rPr lang="hu-HU" sz="2400" dirty="0"/>
+                <a:rPr lang="hu-HU" sz="2200" dirty="0"/>
                 <a:t>Player.js osztály</a:t>
               </a:r>
             </a:p>
@@ -7564,7 +7603,7 @@
                 <a:buChar char="•"/>
               </a:pPr>
               <a:r>
-                <a:rPr lang="hu-HU" sz="2400" dirty="0"/>
+                <a:rPr lang="hu-HU" sz="2200" dirty="0"/>
                 <a:t>Játékosok hozzáadása, törlése</a:t>
               </a:r>
             </a:p>
@@ -7574,7 +7613,7 @@
                 <a:buChar char="•"/>
               </a:pPr>
               <a:r>
-                <a:rPr lang="hu-HU" sz="2400" dirty="0"/>
+                <a:rPr lang="hu-HU" sz="2200" dirty="0"/>
                 <a:t>Web design, CSS</a:t>
               </a:r>
             </a:p>
@@ -7584,19 +7623,19 @@
                 <a:buChar char="•"/>
               </a:pPr>
               <a:r>
-                <a:rPr lang="hu-HU" sz="2400" dirty="0" err="1"/>
+                <a:rPr lang="hu-HU" sz="2200" dirty="0" err="1"/>
                 <a:t>Toastok</a:t>
               </a:r>
               <a:r>
-                <a:rPr lang="hu-HU" sz="2400" dirty="0"/>
+                <a:rPr lang="hu-HU" sz="2200" dirty="0"/>
                 <a:t>, </a:t>
               </a:r>
               <a:r>
-                <a:rPr lang="hu-HU" sz="2400" dirty="0" err="1"/>
+                <a:rPr lang="hu-HU" sz="2200" dirty="0" err="1"/>
                 <a:t>Modalok</a:t>
               </a:r>
               <a:r>
-                <a:rPr lang="hu-HU" sz="2400" dirty="0"/>
+                <a:rPr lang="hu-HU" sz="2200" dirty="0"/>
                 <a:t> kivitelezése</a:t>
               </a:r>
             </a:p>
@@ -7606,7 +7645,7 @@
                 <a:buChar char="•"/>
               </a:pPr>
               <a:r>
-                <a:rPr lang="hu-HU" sz="2400" dirty="0"/>
+                <a:rPr lang="hu-HU" sz="2200" dirty="0"/>
                 <a:t>PPT</a:t>
               </a:r>
             </a:p>
@@ -7675,18 +7714,25 @@
   <p:clrMapOvr>
     <a:masterClrMapping/>
   </p:clrMapOvr>
-  <mc:AlternateContent xmlns:mc="http://schemas.openxmlformats.org/markup-compatibility/2006">
-    <mc:Choice xmlns:p159="http://schemas.microsoft.com/office/powerpoint/2015/09/main" Requires="p159">
+  <mc:AlternateContent xmlns:mc="http://schemas.openxmlformats.org/markup-compatibility/2006" xmlns:p159="http://schemas.microsoft.com/office/powerpoint/2015/09/main">
+    <mc:Choice Requires="p159">
       <p:transition spd="slow">
         <p159:morph option="byObject"/>
       </p:transition>
     </mc:Choice>
-    <mc:Fallback>
+    <mc:Fallback xmlns="">
       <p:transition spd="slow">
         <p:fade/>
       </p:transition>
     </mc:Fallback>
   </mc:AlternateContent>
+  <p:timing>
+    <p:tnLst>
+      <p:par>
+        <p:cTn id="1" dur="indefinite" restart="never" nodeType="tmRoot"/>
+      </p:par>
+    </p:tnLst>
+  </p:timing>
 </p:sld>
 </file>
 
@@ -7868,14 +7914,14 @@
                 <a:buChar char="•"/>
               </a:pPr>
               <a:r>
-                <a:rPr lang="hu-HU" sz="2400" dirty="0"/>
+                <a:rPr lang="hu-HU" sz="2200" dirty="0"/>
                 <a:t>GitHub </a:t>
               </a:r>
               <a:r>
-                <a:rPr lang="hu-HU" sz="2400" dirty="0" err="1"/>
+                <a:rPr lang="hu-HU" sz="2200" dirty="0" err="1"/>
                 <a:t>init</a:t>
               </a:r>
-              <a:endParaRPr lang="hu-HU" sz="2400" dirty="0"/>
+              <a:endParaRPr lang="hu-HU" sz="2200" dirty="0"/>
             </a:p>
             <a:p>
               <a:pPr marL="457200" indent="-457200">
@@ -7883,7 +7929,7 @@
                 <a:buChar char="•"/>
               </a:pPr>
               <a:r>
-                <a:rPr lang="hu-HU" sz="2400" dirty="0"/>
+                <a:rPr lang="hu-HU" sz="2200" dirty="0"/>
                 <a:t>Game.js osztály</a:t>
               </a:r>
             </a:p>
@@ -7893,7 +7939,7 @@
                 <a:buChar char="•"/>
               </a:pPr>
               <a:r>
-                <a:rPr lang="hu-HU" sz="2400" dirty="0"/>
+                <a:rPr lang="hu-HU" sz="2200" dirty="0"/>
                 <a:t>Adatmodellezés tervezése</a:t>
               </a:r>
             </a:p>
@@ -7903,7 +7949,7 @@
                 <a:buChar char="•"/>
               </a:pPr>
               <a:r>
-                <a:rPr lang="hu-HU" sz="2400" dirty="0"/>
+                <a:rPr lang="hu-HU" sz="2200" dirty="0"/>
                 <a:t>Játékosok megjelenítése, szerkesztése</a:t>
               </a:r>
             </a:p>
@@ -7913,7 +7959,7 @@
                 <a:buChar char="•"/>
               </a:pPr>
               <a:r>
-                <a:rPr lang="hu-HU" sz="2400" dirty="0"/>
+                <a:rPr lang="hu-HU" sz="2200" dirty="0"/>
                 <a:t>Játékosokhoz tartozó statisztikák megjelenítése, szerkesztése</a:t>
               </a:r>
             </a:p>
@@ -8051,7 +8097,7 @@
                 <a:buChar char="•"/>
               </a:pPr>
               <a:r>
-                <a:rPr lang="hu-HU" sz="2400" dirty="0"/>
+                <a:rPr lang="hu-HU" sz="2200" dirty="0"/>
                 <a:t>Tesztkörnyezet előkészítése</a:t>
               </a:r>
             </a:p>
@@ -8061,11 +8107,11 @@
                 <a:buChar char="•"/>
               </a:pPr>
               <a:r>
-                <a:rPr lang="hu-HU" sz="2400" dirty="0" err="1"/>
+                <a:rPr lang="hu-HU" sz="2200" dirty="0" err="1"/>
                 <a:t>Figma</a:t>
               </a:r>
               <a:r>
-                <a:rPr lang="hu-HU" sz="2400" dirty="0"/>
+                <a:rPr lang="hu-HU" sz="2200" dirty="0"/>
                 <a:t> terv teljes</a:t>
               </a:r>
             </a:p>
@@ -8075,7 +8121,7 @@
                 <a:buChar char="•"/>
               </a:pPr>
               <a:r>
-                <a:rPr lang="hu-HU" sz="2400" dirty="0"/>
+                <a:rPr lang="hu-HU" sz="2200" dirty="0"/>
                 <a:t>Player.js osztály</a:t>
               </a:r>
             </a:p>
@@ -8085,7 +8131,7 @@
                 <a:buChar char="•"/>
               </a:pPr>
               <a:r>
-                <a:rPr lang="hu-HU" sz="2400" dirty="0"/>
+                <a:rPr lang="hu-HU" sz="2200" dirty="0"/>
                 <a:t>Játékosok hozzáadása, törlése</a:t>
               </a:r>
             </a:p>
@@ -8095,7 +8141,7 @@
                 <a:buChar char="•"/>
               </a:pPr>
               <a:r>
-                <a:rPr lang="hu-HU" sz="2400" dirty="0"/>
+                <a:rPr lang="hu-HU" sz="2200" dirty="0"/>
                 <a:t>Web design, CSS</a:t>
               </a:r>
             </a:p>
@@ -8105,19 +8151,19 @@
                 <a:buChar char="•"/>
               </a:pPr>
               <a:r>
-                <a:rPr lang="hu-HU" sz="2400" dirty="0" err="1"/>
+                <a:rPr lang="hu-HU" sz="2200" dirty="0" err="1"/>
                 <a:t>Toastok</a:t>
               </a:r>
               <a:r>
-                <a:rPr lang="hu-HU" sz="2400" dirty="0"/>
+                <a:rPr lang="hu-HU" sz="2200" dirty="0"/>
                 <a:t>, </a:t>
               </a:r>
               <a:r>
-                <a:rPr lang="hu-HU" sz="2400" dirty="0" err="1"/>
+                <a:rPr lang="hu-HU" sz="2200" dirty="0" err="1"/>
                 <a:t>Modalok</a:t>
               </a:r>
               <a:r>
-                <a:rPr lang="hu-HU" sz="2400" dirty="0"/>
+                <a:rPr lang="hu-HU" sz="2200" dirty="0"/>
                 <a:t> kivitelezése</a:t>
               </a:r>
             </a:p>
@@ -8127,7 +8173,7 @@
                 <a:buChar char="•"/>
               </a:pPr>
               <a:r>
-                <a:rPr lang="hu-HU" sz="2400" dirty="0"/>
+                <a:rPr lang="hu-HU" sz="2200" dirty="0"/>
                 <a:t>PPT</a:t>
               </a:r>
             </a:p>
@@ -8231,18 +8277,25 @@
   <p:clrMapOvr>
     <a:masterClrMapping/>
   </p:clrMapOvr>
-  <mc:AlternateContent xmlns:mc="http://schemas.openxmlformats.org/markup-compatibility/2006">
-    <mc:Choice xmlns:p159="http://schemas.microsoft.com/office/powerpoint/2015/09/main" Requires="p159">
+  <mc:AlternateContent xmlns:mc="http://schemas.openxmlformats.org/markup-compatibility/2006" xmlns:p159="http://schemas.microsoft.com/office/powerpoint/2015/09/main">
+    <mc:Choice Requires="p159">
       <p:transition spd="slow">
         <p159:morph option="byObject"/>
       </p:transition>
     </mc:Choice>
-    <mc:Fallback>
+    <mc:Fallback xmlns="">
       <p:transition spd="slow">
         <p:fade/>
       </p:transition>
     </mc:Fallback>
   </mc:AlternateContent>
+  <p:timing>
+    <p:tnLst>
+      <p:par>
+        <p:cTn id="1" dur="indefinite" restart="never" nodeType="tmRoot"/>
+      </p:par>
+    </p:tnLst>
+  </p:timing>
 </p:sld>
 </file>
 
@@ -8446,11 +8499,11 @@
                 <a:buChar char="•"/>
               </a:pPr>
               <a:r>
-                <a:rPr lang="hu-HU" sz="2600" dirty="0" err="1"/>
+                <a:rPr lang="hu-HU" sz="2200" dirty="0" err="1"/>
                 <a:t>Bootstrap</a:t>
               </a:r>
               <a:r>
-                <a:rPr lang="hu-HU" sz="2600" dirty="0"/>
+                <a:rPr lang="hu-HU" sz="2200" dirty="0"/>
                 <a:t> tudás kiegészítése</a:t>
               </a:r>
             </a:p>
@@ -8460,23 +8513,23 @@
                 <a:buChar char="•"/>
               </a:pPr>
               <a:r>
-                <a:rPr lang="hu-HU" sz="2600" dirty="0"/>
+                <a:rPr lang="hu-HU" sz="2200" dirty="0"/>
                 <a:t>.is-</a:t>
               </a:r>
               <a:r>
-                <a:rPr lang="hu-HU" sz="2600" dirty="0" err="1"/>
+                <a:rPr lang="hu-HU" sz="2200" dirty="0" err="1"/>
                 <a:t>invalid</a:t>
               </a:r>
               <a:r>
-                <a:rPr lang="hu-HU" sz="2600" dirty="0"/>
+                <a:rPr lang="hu-HU" sz="2200" dirty="0"/>
                 <a:t> (</a:t>
               </a:r>
               <a:r>
-                <a:rPr lang="hu-HU" sz="2600" dirty="0" err="1"/>
+                <a:rPr lang="hu-HU" sz="2200" dirty="0" err="1"/>
                 <a:t>form</a:t>
               </a:r>
               <a:r>
-                <a:rPr lang="hu-HU" sz="2600" dirty="0"/>
+                <a:rPr lang="hu-HU" sz="2200" dirty="0"/>
                 <a:t>)</a:t>
               </a:r>
             </a:p>
@@ -8486,11 +8539,11 @@
                 <a:buChar char="•"/>
               </a:pPr>
               <a:r>
-                <a:rPr lang="hu-HU" sz="2600" dirty="0" err="1"/>
+                <a:rPr lang="hu-HU" sz="2200" dirty="0" err="1"/>
                 <a:t>Reszponzivitás</a:t>
               </a:r>
               <a:r>
-                <a:rPr lang="hu-HU" sz="2600" dirty="0"/>
+                <a:rPr lang="hu-HU" sz="2200" dirty="0"/>
                 <a:t> ismeret</a:t>
               </a:r>
             </a:p>
@@ -8500,23 +8553,23 @@
                 <a:buChar char="•"/>
               </a:pPr>
               <a:r>
-                <a:rPr lang="hu-HU" sz="2600" dirty="0"/>
+                <a:rPr lang="hu-HU" sz="2200" dirty="0"/>
                 <a:t>A weboldalon kívül semmilyen más helyen nem használtuk! (PPT, </a:t>
               </a:r>
               <a:r>
-                <a:rPr lang="hu-HU" sz="2600" dirty="0" err="1"/>
+                <a:rPr lang="hu-HU" sz="2200" dirty="0" err="1"/>
                 <a:t>Figma</a:t>
               </a:r>
               <a:r>
-                <a:rPr lang="hu-HU" sz="2600" dirty="0"/>
+                <a:rPr lang="hu-HU" sz="2200" dirty="0"/>
                 <a:t> </a:t>
               </a:r>
               <a:r>
-                <a:rPr lang="hu-HU" sz="2600" dirty="0" err="1"/>
+                <a:rPr lang="hu-HU" sz="2200" dirty="0" err="1"/>
                 <a:t>stb</a:t>
               </a:r>
               <a:r>
-                <a:rPr lang="hu-HU" sz="2600" dirty="0"/>
+                <a:rPr lang="hu-HU" sz="2200" dirty="0"/>
                 <a:t>)</a:t>
               </a:r>
             </a:p>
@@ -8526,15 +8579,15 @@
                 <a:buChar char="•"/>
               </a:pPr>
               <a:r>
-                <a:rPr lang="hu-HU" sz="2600" dirty="0"/>
+                <a:rPr lang="hu-HU" sz="2200" dirty="0"/>
                 <a:t>Így tehát a projektnek </a:t>
               </a:r>
               <a:r>
-                <a:rPr lang="hu-HU" sz="2600" dirty="0" err="1"/>
+                <a:rPr lang="hu-HU" sz="2200" dirty="0" err="1"/>
                 <a:t>mégkevesebb</a:t>
               </a:r>
               <a:r>
-                <a:rPr lang="hu-HU" sz="2600" dirty="0"/>
+                <a:rPr lang="hu-HU" sz="2200" dirty="0"/>
                 <a:t> százaléka AI!</a:t>
               </a:r>
             </a:p>
@@ -8543,7 +8596,7 @@
                 <a:buFont typeface="Arial" panose="020B0604020202020204" pitchFamily="34" charset="0"/>
                 <a:buChar char="•"/>
               </a:pPr>
-              <a:endParaRPr lang="hu-HU" sz="2600" dirty="0"/>
+              <a:endParaRPr lang="hu-HU" sz="2400" dirty="0"/>
             </a:p>
           </p:txBody>
         </p:sp>
@@ -8668,7 +8721,7 @@
             <a:lstStyle/>
             <a:p>
               <a:r>
-                <a:rPr lang="hu-HU" sz="2600" dirty="0"/>
+                <a:rPr lang="hu-HU" sz="2200" dirty="0"/>
                 <a:t>AI-Használat:</a:t>
               </a:r>
             </a:p>
@@ -8678,11 +8731,11 @@
                 <a:buChar char="•"/>
               </a:pPr>
               <a:r>
-                <a:rPr lang="hu-HU" sz="2600" dirty="0" err="1"/>
+                <a:rPr lang="hu-HU" sz="2200" dirty="0" err="1"/>
                 <a:t>Helper-functionok</a:t>
               </a:r>
               <a:r>
-                <a:rPr lang="hu-HU" sz="2600" dirty="0"/>
+                <a:rPr lang="hu-HU" sz="2200" dirty="0"/>
                 <a:t> megírása </a:t>
               </a:r>
             </a:p>
@@ -8692,9 +8745,14 @@
                 <a:buChar char="•"/>
               </a:pPr>
               <a:r>
-                <a:rPr lang="hu-HU" sz="2600" dirty="0"/>
-                <a:t>általában kiíratás segítéséhez, inputellenőrzéshez</a:t>
-              </a:r>
+                <a:rPr lang="hu-HU" sz="2200" dirty="0"/>
+                <a:t>általában kiíratás segítéséhez, inputellenőr-</a:t>
+              </a:r>
+              <a:r>
+                <a:rPr lang="hu-HU" sz="2200" dirty="0" err="1"/>
+                <a:t>zéshez</a:t>
+              </a:r>
+              <a:endParaRPr lang="hu-HU" sz="2200" dirty="0"/>
             </a:p>
             <a:p>
               <a:pPr marL="457200" indent="-457200">
@@ -8702,11 +8760,11 @@
                 <a:buChar char="•"/>
               </a:pPr>
               <a:r>
-                <a:rPr lang="hu-HU" sz="2600" dirty="0" err="1"/>
+                <a:rPr lang="hu-HU" sz="2200" dirty="0" err="1"/>
                 <a:t>Bootstrapes</a:t>
               </a:r>
               <a:r>
-                <a:rPr lang="hu-HU" sz="2600" dirty="0"/>
+                <a:rPr lang="hu-HU" sz="2200" dirty="0"/>
                 <a:t> színek átírása (CSS)</a:t>
               </a:r>
             </a:p>
@@ -8716,10 +8774,10 @@
                 <a:buChar char="•"/>
               </a:pPr>
               <a:r>
-                <a:rPr lang="hu-HU" sz="2600" dirty="0" err="1"/>
+                <a:rPr lang="hu-HU" sz="2200" dirty="0" err="1"/>
                 <a:t>Debuggolás</a:t>
               </a:r>
-              <a:endParaRPr lang="hu-HU" sz="2600" dirty="0"/>
+              <a:endParaRPr lang="hu-HU" sz="2200" dirty="0"/>
             </a:p>
             <a:p>
               <a:pPr marL="914400" lvl="1" indent="-457200">
@@ -8727,18 +8785,18 @@
                 <a:buChar char="•"/>
               </a:pPr>
               <a:r>
-                <a:rPr lang="hu-HU" sz="2600" dirty="0" err="1"/>
+                <a:rPr lang="hu-HU" sz="2200" dirty="0" err="1"/>
                 <a:t>Winrate</a:t>
               </a:r>
               <a:r>
-                <a:rPr lang="hu-HU" sz="2600" dirty="0"/>
+                <a:rPr lang="hu-HU" sz="2200" dirty="0"/>
                 <a:t> </a:t>
               </a:r>
               <a:r>
-                <a:rPr lang="hu-HU" sz="2600" dirty="0" err="1"/>
+                <a:rPr lang="hu-HU" sz="2200" dirty="0" err="1"/>
                 <a:t>chart</a:t>
               </a:r>
-              <a:endParaRPr lang="hu-HU" sz="2600" dirty="0"/>
+              <a:endParaRPr lang="hu-HU" sz="2200" dirty="0"/>
             </a:p>
             <a:p>
               <a:pPr marL="457200" indent="-457200">
@@ -8746,10 +8804,10 @@
                 <a:buChar char="•"/>
               </a:pPr>
               <a:r>
-                <a:rPr lang="hu-HU" sz="2600" dirty="0" err="1"/>
+                <a:rPr lang="hu-HU" sz="2200" dirty="0" err="1"/>
                 <a:t>Logo</a:t>
               </a:r>
-              <a:endParaRPr lang="hu-HU" sz="2600" dirty="0"/>
+              <a:endParaRPr lang="hu-HU" sz="2200" dirty="0"/>
             </a:p>
             <a:p>
               <a:endParaRPr lang="hu-HU" sz="2600" dirty="0"/>
@@ -8819,18 +8877,25 @@
   <p:clrMapOvr>
     <a:masterClrMapping/>
   </p:clrMapOvr>
-  <mc:AlternateContent xmlns:mc="http://schemas.openxmlformats.org/markup-compatibility/2006">
-    <mc:Choice xmlns:p159="http://schemas.microsoft.com/office/powerpoint/2015/09/main" Requires="p159">
+  <mc:AlternateContent xmlns:mc="http://schemas.openxmlformats.org/markup-compatibility/2006" xmlns:p159="http://schemas.microsoft.com/office/powerpoint/2015/09/main">
+    <mc:Choice Requires="p159">
       <p:transition spd="slow">
         <p159:morph option="byObject"/>
       </p:transition>
     </mc:Choice>
-    <mc:Fallback>
+    <mc:Fallback xmlns="">
       <p:transition spd="slow">
         <p:fade/>
       </p:transition>
     </mc:Fallback>
   </mc:AlternateContent>
+  <p:timing>
+    <p:tnLst>
+      <p:par>
+        <p:cTn id="1" dur="indefinite" restart="never" nodeType="tmRoot"/>
+      </p:par>
+    </p:tnLst>
+  </p:timing>
 </p:sld>
 </file>
 
@@ -9002,9 +9067,10 @@
             <a:lstStyle/>
             <a:p>
               <a:r>
-                <a:rPr lang="hu-HU" sz="2600" dirty="0"/>
+                <a:rPr lang="hu-HU" sz="2200" dirty="0" smtClean="0"/>
                 <a:t>AI-Használat:</a:t>
               </a:r>
+              <a:endParaRPr lang="hu-HU" sz="2200" dirty="0"/>
             </a:p>
             <a:p>
               <a:pPr marL="457200" indent="-457200">
@@ -9012,12 +9078,16 @@
                 <a:buChar char="•"/>
               </a:pPr>
               <a:r>
-                <a:rPr lang="hu-HU" sz="2600" dirty="0" err="1"/>
+                <a:rPr lang="hu-HU" sz="2200" dirty="0" err="1" smtClean="0"/>
                 <a:t>Helper-functionok</a:t>
               </a:r>
               <a:r>
-                <a:rPr lang="hu-HU" sz="2600" dirty="0"/>
-                <a:t> megírása </a:t>
+                <a:rPr lang="hu-HU" sz="2200" dirty="0" smtClean="0"/>
+                <a:t> </a:t>
+              </a:r>
+              <a:r>
+                <a:rPr lang="hu-HU" sz="2200" dirty="0"/>
+                <a:t>megírása </a:t>
               </a:r>
             </a:p>
             <a:p>
@@ -9026,9 +9096,22 @@
                 <a:buChar char="•"/>
               </a:pPr>
               <a:r>
-                <a:rPr lang="hu-HU" sz="2600" dirty="0"/>
-                <a:t>általában kiíratás segítéséhez, inputellenőrzéshez</a:t>
-              </a:r>
+                <a:rPr lang="hu-HU" sz="2200" dirty="0" smtClean="0"/>
+                <a:t>általában kiíratás segítéséhez</a:t>
+              </a:r>
+              <a:r>
+                <a:rPr lang="hu-HU" sz="2200" dirty="0"/>
+                <a:t>, </a:t>
+              </a:r>
+              <a:r>
+                <a:rPr lang="hu-HU" sz="2200" dirty="0" smtClean="0"/>
+                <a:t>inputellenőr-</a:t>
+              </a:r>
+              <a:r>
+                <a:rPr lang="hu-HU" sz="2200" dirty="0" err="1" smtClean="0"/>
+                <a:t>zéshez</a:t>
+              </a:r>
+              <a:endParaRPr lang="hu-HU" sz="2200" dirty="0"/>
             </a:p>
             <a:p>
               <a:pPr marL="457200" indent="-457200">
@@ -9036,11 +9119,11 @@
                 <a:buChar char="•"/>
               </a:pPr>
               <a:r>
-                <a:rPr lang="hu-HU" sz="2600" dirty="0" err="1"/>
+                <a:rPr lang="hu-HU" sz="2200" dirty="0" err="1"/>
                 <a:t>Bootstrapes</a:t>
               </a:r>
               <a:r>
-                <a:rPr lang="hu-HU" sz="2600" dirty="0"/>
+                <a:rPr lang="hu-HU" sz="2200" dirty="0"/>
                 <a:t> színek átírása (CSS)</a:t>
               </a:r>
             </a:p>
@@ -9050,10 +9133,10 @@
                 <a:buChar char="•"/>
               </a:pPr>
               <a:r>
-                <a:rPr lang="hu-HU" sz="2600" dirty="0" err="1"/>
+                <a:rPr lang="hu-HU" sz="2200" dirty="0" err="1"/>
                 <a:t>Debuggolás</a:t>
               </a:r>
-              <a:endParaRPr lang="hu-HU" sz="2600" dirty="0"/>
+              <a:endParaRPr lang="hu-HU" sz="2200" dirty="0"/>
             </a:p>
             <a:p>
               <a:pPr marL="914400" lvl="1" indent="-457200">
@@ -9061,18 +9144,18 @@
                 <a:buChar char="•"/>
               </a:pPr>
               <a:r>
-                <a:rPr lang="hu-HU" sz="2600" dirty="0" err="1"/>
+                <a:rPr lang="hu-HU" sz="2200" dirty="0" err="1"/>
                 <a:t>Winrate</a:t>
               </a:r>
               <a:r>
-                <a:rPr lang="hu-HU" sz="2600" dirty="0"/>
+                <a:rPr lang="hu-HU" sz="2200" dirty="0"/>
                 <a:t> </a:t>
               </a:r>
               <a:r>
-                <a:rPr lang="hu-HU" sz="2600" dirty="0" err="1"/>
+                <a:rPr lang="hu-HU" sz="2200" dirty="0" err="1"/>
                 <a:t>chart</a:t>
               </a:r>
-              <a:endParaRPr lang="hu-HU" sz="2600" dirty="0"/>
+              <a:endParaRPr lang="hu-HU" sz="2200" dirty="0"/>
             </a:p>
             <a:p>
               <a:pPr marL="457200" indent="-457200">
@@ -9080,10 +9163,10 @@
                 <a:buChar char="•"/>
               </a:pPr>
               <a:r>
-                <a:rPr lang="hu-HU" sz="2600" dirty="0" err="1"/>
+                <a:rPr lang="hu-HU" sz="2200" dirty="0" err="1"/>
                 <a:t>Logo</a:t>
               </a:r>
-              <a:endParaRPr lang="hu-HU" sz="2600" dirty="0"/>
+              <a:endParaRPr lang="hu-HU" sz="2200" dirty="0"/>
             </a:p>
           </p:txBody>
         </p:sp>
@@ -9212,11 +9295,11 @@
                 <a:buChar char="•"/>
               </a:pPr>
               <a:r>
-                <a:rPr lang="hu-HU" sz="2600" dirty="0" err="1"/>
+                <a:rPr lang="hu-HU" sz="2200" dirty="0" err="1"/>
                 <a:t>Bootstrap</a:t>
               </a:r>
               <a:r>
-                <a:rPr lang="hu-HU" sz="2600" dirty="0"/>
+                <a:rPr lang="hu-HU" sz="2200" dirty="0"/>
                 <a:t> tudás kiegészítése</a:t>
               </a:r>
             </a:p>
@@ -9226,23 +9309,23 @@
                 <a:buChar char="•"/>
               </a:pPr>
               <a:r>
-                <a:rPr lang="hu-HU" sz="2600" dirty="0"/>
+                <a:rPr lang="hu-HU" sz="2200" dirty="0"/>
                 <a:t>.is-</a:t>
               </a:r>
               <a:r>
-                <a:rPr lang="hu-HU" sz="2600" dirty="0" err="1"/>
+                <a:rPr lang="hu-HU" sz="2200" dirty="0" err="1"/>
                 <a:t>invalid</a:t>
               </a:r>
               <a:r>
-                <a:rPr lang="hu-HU" sz="2600" dirty="0"/>
+                <a:rPr lang="hu-HU" sz="2200" dirty="0"/>
                 <a:t> (</a:t>
               </a:r>
               <a:r>
-                <a:rPr lang="hu-HU" sz="2600" dirty="0" err="1"/>
+                <a:rPr lang="hu-HU" sz="2200" dirty="0" err="1"/>
                 <a:t>form</a:t>
               </a:r>
               <a:r>
-                <a:rPr lang="hu-HU" sz="2600" dirty="0"/>
+                <a:rPr lang="hu-HU" sz="2200" dirty="0"/>
                 <a:t>)</a:t>
               </a:r>
             </a:p>
@@ -9252,11 +9335,11 @@
                 <a:buChar char="•"/>
               </a:pPr>
               <a:r>
-                <a:rPr lang="hu-HU" sz="2600" dirty="0" err="1"/>
+                <a:rPr lang="hu-HU" sz="2200" dirty="0" err="1"/>
                 <a:t>Reszponzivitás</a:t>
               </a:r>
               <a:r>
-                <a:rPr lang="hu-HU" sz="2600" dirty="0"/>
+                <a:rPr lang="hu-HU" sz="2200" dirty="0"/>
                 <a:t> ismeret</a:t>
               </a:r>
             </a:p>
@@ -9266,23 +9349,23 @@
                 <a:buChar char="•"/>
               </a:pPr>
               <a:r>
-                <a:rPr lang="hu-HU" sz="2600" dirty="0"/>
+                <a:rPr lang="hu-HU" sz="2200" dirty="0"/>
                 <a:t>A weboldalon kívül semmilyen más helyen nem használtuk! (PPT, </a:t>
               </a:r>
               <a:r>
-                <a:rPr lang="hu-HU" sz="2600" dirty="0" err="1"/>
+                <a:rPr lang="hu-HU" sz="2200" dirty="0" err="1"/>
                 <a:t>Figma</a:t>
               </a:r>
               <a:r>
-                <a:rPr lang="hu-HU" sz="2600" dirty="0"/>
+                <a:rPr lang="hu-HU" sz="2200" dirty="0"/>
                 <a:t> </a:t>
               </a:r>
               <a:r>
-                <a:rPr lang="hu-HU" sz="2600" dirty="0" err="1"/>
+                <a:rPr lang="hu-HU" sz="2200" dirty="0" err="1"/>
                 <a:t>stb</a:t>
               </a:r>
               <a:r>
-                <a:rPr lang="hu-HU" sz="2600" dirty="0"/>
+                <a:rPr lang="hu-HU" sz="2200" dirty="0"/>
                 <a:t>)</a:t>
               </a:r>
             </a:p>
@@ -9292,15 +9375,15 @@
                 <a:buChar char="•"/>
               </a:pPr>
               <a:r>
-                <a:rPr lang="hu-HU" sz="2600" dirty="0"/>
+                <a:rPr lang="hu-HU" sz="2200" dirty="0"/>
                 <a:t>Így tehát a projektnek </a:t>
               </a:r>
               <a:r>
-                <a:rPr lang="hu-HU" sz="2600" dirty="0" err="1"/>
+                <a:rPr lang="hu-HU" sz="2200" dirty="0" err="1"/>
                 <a:t>mégkevesebb</a:t>
               </a:r>
               <a:r>
-                <a:rPr lang="hu-HU" sz="2600" dirty="0"/>
+                <a:rPr lang="hu-HU" sz="2200" dirty="0"/>
                 <a:t> százaléka AI!</a:t>
               </a:r>
             </a:p>
@@ -9369,18 +9452,25 @@
   <p:clrMapOvr>
     <a:masterClrMapping/>
   </p:clrMapOvr>
-  <mc:AlternateContent xmlns:mc="http://schemas.openxmlformats.org/markup-compatibility/2006">
-    <mc:Choice xmlns:p159="http://schemas.microsoft.com/office/powerpoint/2015/09/main" Requires="p159">
+  <mc:AlternateContent xmlns:mc="http://schemas.openxmlformats.org/markup-compatibility/2006" xmlns:p159="http://schemas.microsoft.com/office/powerpoint/2015/09/main">
+    <mc:Choice Requires="p159">
       <p:transition spd="slow">
         <p159:morph option="byObject"/>
       </p:transition>
     </mc:Choice>
-    <mc:Fallback>
+    <mc:Fallback xmlns="">
       <p:transition spd="slow">
         <p:fade/>
       </p:transition>
     </mc:Fallback>
   </mc:AlternateContent>
+  <p:timing>
+    <p:tnLst>
+      <p:par>
+        <p:cTn id="1" dur="indefinite" restart="never" nodeType="tmRoot"/>
+      </p:par>
+    </p:tnLst>
+  </p:timing>
 </p:sld>
 </file>
 
@@ -9571,7 +9661,7 @@
                 <a:buChar char="•"/>
               </a:pPr>
               <a:r>
-                <a:rPr lang="hu-HU" sz="2400" dirty="0"/>
+                <a:rPr lang="hu-HU" sz="2200" dirty="0"/>
                 <a:t>Első teszt:</a:t>
               </a:r>
             </a:p>
@@ -9581,20 +9671,12 @@
                 <a:buChar char="•"/>
               </a:pPr>
               <a:r>
-                <a:rPr lang="hu-HU" sz="2400" dirty="0" err="1"/>
+                <a:rPr lang="hu-HU" sz="2200" dirty="0" err="1"/>
                 <a:t>to_string</a:t>
               </a:r>
               <a:r>
-                <a:rPr lang="hu-HU" sz="2400" dirty="0"/>
-                <a:t>() metódusban a játék objektum került kiírásra a .</a:t>
-              </a:r>
-              <a:r>
-                <a:rPr lang="hu-HU" sz="2400" dirty="0" err="1"/>
-                <a:t>get_name</a:t>
-              </a:r>
-              <a:r>
-                <a:rPr lang="hu-HU" sz="2400" dirty="0"/>
-                <a:t>() helyett</a:t>
+                <a:rPr lang="hu-HU" sz="2200" dirty="0"/>
+                <a:t>() metódusban a játék objektum került kiírásra a játék címe helyett</a:t>
               </a:r>
             </a:p>
             <a:p>
@@ -9603,7 +9685,7 @@
                 <a:buChar char="•"/>
               </a:pPr>
               <a:r>
-                <a:rPr lang="hu-HU" sz="2400" dirty="0"/>
+                <a:rPr lang="hu-HU" sz="2200" dirty="0"/>
                 <a:t>Második teszt:</a:t>
               </a:r>
             </a:p>
@@ -9613,7 +9695,7 @@
                 <a:buChar char="•"/>
               </a:pPr>
               <a:r>
-                <a:rPr lang="hu-HU" sz="2400" dirty="0"/>
+                <a:rPr lang="hu-HU" sz="2200" dirty="0"/>
                 <a:t>Nincs ellenőrizve, hogy a game változó Game példányt kap-e</a:t>
               </a:r>
             </a:p>
@@ -9623,9 +9705,10 @@
                 <a:buChar char="•"/>
               </a:pPr>
               <a:r>
-                <a:rPr lang="hu-HU" sz="2400" dirty="0"/>
+                <a:rPr lang="hu-HU" sz="2200" dirty="0"/>
                 <a:t>Számokat el lehet tárolni a teljes névben</a:t>
               </a:r>
+              <a:endParaRPr lang="hu-HU" sz="2200" dirty="0"/>
             </a:p>
           </p:txBody>
         </p:sp>
@@ -9760,7 +9843,7 @@
                 <a:buChar char="•"/>
               </a:pPr>
               <a:r>
-                <a:rPr lang="hu-HU" sz="2400" dirty="0"/>
+                <a:rPr lang="hu-HU" sz="2200" dirty="0"/>
                 <a:t>Első teszt:</a:t>
               </a:r>
             </a:p>
@@ -9770,11 +9853,11 @@
                 <a:buChar char="•"/>
               </a:pPr>
               <a:r>
-                <a:rPr lang="hu-HU" sz="2400" dirty="0" err="1"/>
+                <a:rPr lang="hu-HU" sz="2200" dirty="0" err="1"/>
                 <a:t>Statfelvételnél</a:t>
               </a:r>
               <a:r>
-                <a:rPr lang="hu-HU" sz="2400" dirty="0"/>
+                <a:rPr lang="hu-HU" sz="2200" dirty="0"/>
                 <a:t> nem volt ellenőrizve az index, amelyre felvesszük az adatot</a:t>
               </a:r>
             </a:p>
@@ -9784,7 +9867,7 @@
                 <a:buChar char="•"/>
               </a:pPr>
               <a:r>
-                <a:rPr lang="hu-HU" sz="2400" dirty="0"/>
+                <a:rPr lang="hu-HU" sz="2200" dirty="0"/>
                 <a:t>Második teszt:</a:t>
               </a:r>
             </a:p>
@@ -9794,18 +9877,18 @@
                 <a:buChar char="•"/>
               </a:pPr>
               <a:r>
-                <a:rPr lang="hu-HU" sz="2400" dirty="0" err="1"/>
+                <a:rPr lang="hu-HU" sz="2200" dirty="0" err="1"/>
                 <a:t>Stat</a:t>
               </a:r>
               <a:r>
-                <a:rPr lang="hu-HU" sz="2400" dirty="0"/>
+                <a:rPr lang="hu-HU" sz="2200" dirty="0"/>
                 <a:t> értékadásnál nem volt ellenőrizve, hogy létezik-e a </a:t>
               </a:r>
               <a:r>
-                <a:rPr lang="hu-HU" sz="2400" dirty="0" err="1"/>
+                <a:rPr lang="hu-HU" sz="2200" dirty="0" err="1"/>
                 <a:t>stat</a:t>
               </a:r>
-              <a:endParaRPr lang="hu-HU" sz="2400" dirty="0"/>
+              <a:endParaRPr lang="hu-HU" sz="2200" dirty="0"/>
             </a:p>
           </p:txBody>
         </p:sp>
@@ -9872,18 +9955,25 @@
   <p:clrMapOvr>
     <a:masterClrMapping/>
   </p:clrMapOvr>
-  <mc:AlternateContent xmlns:mc="http://schemas.openxmlformats.org/markup-compatibility/2006">
-    <mc:Choice xmlns:p159="http://schemas.microsoft.com/office/powerpoint/2015/09/main" Requires="p159">
+  <mc:AlternateContent xmlns:mc="http://schemas.openxmlformats.org/markup-compatibility/2006" xmlns:p159="http://schemas.microsoft.com/office/powerpoint/2015/09/main">
+    <mc:Choice Requires="p159">
       <p:transition spd="slow">
         <p159:morph option="byObject"/>
       </p:transition>
     </mc:Choice>
-    <mc:Fallback>
+    <mc:Fallback xmlns="">
       <p:transition spd="slow">
         <p:fade/>
       </p:transition>
     </mc:Fallback>
   </mc:AlternateContent>
+  <p:timing>
+    <p:tnLst>
+      <p:par>
+        <p:cTn id="1" dur="indefinite" restart="never" nodeType="tmRoot"/>
+      </p:par>
+    </p:tnLst>
+  </p:timing>
 </p:sld>
 </file>
 
@@ -10067,7 +10157,7 @@
                 <a:buChar char="•"/>
               </a:pPr>
               <a:r>
-                <a:rPr lang="hu-HU" sz="2400" dirty="0"/>
+                <a:rPr lang="hu-HU" sz="2200" dirty="0"/>
                 <a:t>Első teszt:</a:t>
               </a:r>
             </a:p>
@@ -10077,21 +10167,18 @@
                 <a:buChar char="•"/>
               </a:pPr>
               <a:r>
-                <a:rPr lang="hu-HU" sz="2400" dirty="0" err="1"/>
+                <a:rPr lang="hu-HU" sz="2200" dirty="0" err="1"/>
                 <a:t>to_string</a:t>
               </a:r>
               <a:r>
-                <a:rPr lang="hu-HU" sz="2400" dirty="0"/>
-                <a:t>() metódusban a játék objektum került kiírásra a .</a:t>
-              </a:r>
-              <a:r>
-                <a:rPr lang="hu-HU" sz="2400" dirty="0" err="1"/>
-                <a:t>get_name</a:t>
-              </a:r>
-              <a:r>
-                <a:rPr lang="hu-HU" sz="2400" dirty="0"/>
-                <a:t>() helyett</a:t>
-              </a:r>
+                <a:rPr lang="hu-HU" sz="2200" dirty="0"/>
+                <a:t>() metódusban a játék objektum került kiírásra </a:t>
+              </a:r>
+              <a:r>
+                <a:rPr lang="hu-HU" sz="2200" dirty="0" smtClean="0"/>
+                <a:t>a játék címe helyett</a:t>
+              </a:r>
+              <a:endParaRPr lang="hu-HU" sz="2200" dirty="0"/>
             </a:p>
             <a:p>
               <a:pPr marL="457200" indent="-457200">
@@ -10099,7 +10186,7 @@
                 <a:buChar char="•"/>
               </a:pPr>
               <a:r>
-                <a:rPr lang="hu-HU" sz="2400" dirty="0"/>
+                <a:rPr lang="hu-HU" sz="2200" dirty="0"/>
                 <a:t>Második teszt:</a:t>
               </a:r>
             </a:p>
@@ -10109,7 +10196,7 @@
                 <a:buChar char="•"/>
               </a:pPr>
               <a:r>
-                <a:rPr lang="hu-HU" sz="2400" dirty="0"/>
+                <a:rPr lang="hu-HU" sz="2200" dirty="0"/>
                 <a:t>Nincs ellenőrizve, hogy a game változó Game példányt kap-e</a:t>
               </a:r>
             </a:p>
@@ -10119,7 +10206,7 @@
                 <a:buChar char="•"/>
               </a:pPr>
               <a:r>
-                <a:rPr lang="hu-HU" sz="2400" dirty="0"/>
+                <a:rPr lang="hu-HU" sz="2200" dirty="0"/>
                 <a:t>Számokat el lehet tárolni a teljes névben</a:t>
               </a:r>
             </a:p>
@@ -10588,18 +10675,25 @@
   <p:clrMapOvr>
     <a:masterClrMapping/>
   </p:clrMapOvr>
-  <mc:AlternateContent xmlns:mc="http://schemas.openxmlformats.org/markup-compatibility/2006">
-    <mc:Choice xmlns:p159="http://schemas.microsoft.com/office/powerpoint/2015/09/main" Requires="p159">
+  <mc:AlternateContent xmlns:mc="http://schemas.openxmlformats.org/markup-compatibility/2006" xmlns:p159="http://schemas.microsoft.com/office/powerpoint/2015/09/main">
+    <mc:Choice Requires="p159">
       <p:transition spd="slow">
         <p159:morph option="byObject"/>
       </p:transition>
     </mc:Choice>
-    <mc:Fallback>
+    <mc:Fallback xmlns="">
       <p:transition spd="slow">
         <p:fade/>
       </p:transition>
     </mc:Fallback>
   </mc:AlternateContent>
+  <p:timing>
+    <p:tnLst>
+      <p:par>
+        <p:cTn id="1" dur="indefinite" restart="never" nodeType="tmRoot"/>
+      </p:par>
+    </p:tnLst>
+  </p:timing>
 </p:sld>
 </file>
 
@@ -11167,46 +11261,46 @@
               <a:lstStyle/>
               <a:p>
                 <a:r>
-                  <a:rPr lang="hu-HU" sz="2800" dirty="0"/>
+                  <a:rPr lang="hu-HU" sz="2400" dirty="0"/>
                   <a:t>Funkciók – Teljesítve</a:t>
                 </a:r>
               </a:p>
               <a:p>
                 <a:r>
-                  <a:rPr lang="hu-HU" sz="2800" dirty="0"/>
+                  <a:rPr lang="hu-HU" sz="2400" dirty="0"/>
                   <a:t>GitHub, </a:t>
                 </a:r>
                 <a:r>
-                  <a:rPr lang="hu-HU" sz="2800" dirty="0" err="1"/>
+                  <a:rPr lang="hu-HU" sz="2400" dirty="0" err="1"/>
                   <a:t>Trello</a:t>
                 </a:r>
                 <a:r>
-                  <a:rPr lang="hu-HU" sz="2800" dirty="0"/>
+                  <a:rPr lang="hu-HU" sz="2400" dirty="0"/>
                   <a:t>, </a:t>
                 </a:r>
                 <a:r>
-                  <a:rPr lang="hu-HU" sz="2800" dirty="0" err="1"/>
+                  <a:rPr lang="hu-HU" sz="2400" dirty="0" err="1"/>
                   <a:t>Figma</a:t>
                 </a:r>
                 <a:r>
-                  <a:rPr lang="hu-HU" sz="2800" dirty="0"/>
+                  <a:rPr lang="hu-HU" sz="2400" dirty="0"/>
                   <a:t> helyes használata - Teljesítve</a:t>
                 </a:r>
               </a:p>
               <a:p>
                 <a:r>
-                  <a:rPr lang="hu-HU" sz="2800" dirty="0"/>
+                  <a:rPr lang="hu-HU" sz="2400" dirty="0"/>
                   <a:t>Felhasznált eszközök – Claude, </a:t>
                 </a:r>
                 <a:r>
-                  <a:rPr lang="hu-HU" sz="2800" dirty="0" err="1"/>
+                  <a:rPr lang="hu-HU" sz="2400" dirty="0" err="1"/>
                   <a:t>DeepSeek</a:t>
                 </a:r>
-                <a:endParaRPr lang="hu-HU" sz="2800" dirty="0"/>
+                <a:endParaRPr lang="hu-HU" sz="2400" dirty="0"/>
               </a:p>
               <a:p>
                 <a:r>
-                  <a:rPr lang="hu-HU" sz="2800" dirty="0"/>
+                  <a:rPr lang="hu-HU" sz="2400" dirty="0"/>
                   <a:t>Kidolgozott grafika - Teljesítve</a:t>
                 </a:r>
               </a:p>
@@ -11309,18 +11403,25 @@
   <p:clrMapOvr>
     <a:masterClrMapping/>
   </p:clrMapOvr>
-  <mc:AlternateContent xmlns:mc="http://schemas.openxmlformats.org/markup-compatibility/2006">
-    <mc:Choice xmlns:p159="http://schemas.microsoft.com/office/powerpoint/2015/09/main" Requires="p159">
+  <mc:AlternateContent xmlns:mc="http://schemas.openxmlformats.org/markup-compatibility/2006" xmlns:p159="http://schemas.microsoft.com/office/powerpoint/2015/09/main">
+    <mc:Choice Requires="p159">
       <p:transition spd="slow">
         <p159:morph option="byObject"/>
       </p:transition>
     </mc:Choice>
-    <mc:Fallback>
+    <mc:Fallback xmlns="">
       <p:transition spd="slow">
         <p:fade/>
       </p:transition>
     </mc:Fallback>
   </mc:AlternateContent>
+  <p:timing>
+    <p:tnLst>
+      <p:par>
+        <p:cTn id="1" dur="indefinite" restart="never" nodeType="tmRoot"/>
+      </p:par>
+    </p:tnLst>
+  </p:timing>
 </p:sld>
 </file>
 
